--- a/SST_Complete_Course_SagarSir/03_Geography_भूगोल/Class_16_Geography_Environment_National_Parks.pptx
+++ b/SST_Complete_Course_SagarSir/03_Geography_भूगोल/Class_16_Geography_Environment_National_Parks.pptx
@@ -3367,7 +3367,7 @@
               </a:defRPr>
             </a:pPr>
             <a:r>
-              <a:t>मार्गदर्शक: श्रवण कुमार 'सागर' (Sagar Sir)  |  Helpline: +91 91101 13671  |  sagarcoaching.tech</a:t>
+              <a:t>मार्गदर्शक: श्रवण कुमार 'सागर' (Sagar Sir)  |  sagarcoaching.tech</a:t>
             </a:r>
           </a:p>
         </p:txBody>
@@ -3558,7 +3558,7 @@
               </a:defRPr>
             </a:pPr>
             <a:r>
-              <a:t>WhatsApp / Helpline: +91 91101 13671  |  Official Website: sagarcoaching.tech  |  Slide 10 of 37</a:t>
+              <a:t>Official Website: sagarcoaching.tech  |  Slide 10 of 37</a:t>
             </a:r>
           </a:p>
         </p:txBody>
@@ -4092,7 +4092,7 @@
               </a:defRPr>
             </a:pPr>
             <a:r>
-              <a:t>WhatsApp / Helpline: +91 91101 13671  |  Official Website: sagarcoaching.tech  |  Slide 11 of 37</a:t>
+              <a:t>Official Website: sagarcoaching.tech  |  Slide 11 of 37</a:t>
             </a:r>
           </a:p>
         </p:txBody>
@@ -4558,7 +4558,7 @@
               </a:defRPr>
             </a:pPr>
             <a:r>
-              <a:t>WhatsApp / Helpline: +91 91101 13671  |  Official Website: sagarcoaching.tech  |  Slide 12 of 37</a:t>
+              <a:t>Official Website: sagarcoaching.tech  |  Slide 12 of 37</a:t>
             </a:r>
           </a:p>
         </p:txBody>
@@ -5092,7 +5092,7 @@
               </a:defRPr>
             </a:pPr>
             <a:r>
-              <a:t>WhatsApp / Helpline: +91 91101 13671  |  Official Website: sagarcoaching.tech  |  Slide 13 of 37</a:t>
+              <a:t>Official Website: sagarcoaching.tech  |  Slide 13 of 37</a:t>
             </a:r>
           </a:p>
         </p:txBody>
@@ -5558,7 +5558,7 @@
               </a:defRPr>
             </a:pPr>
             <a:r>
-              <a:t>WhatsApp / Helpline: +91 91101 13671  |  Official Website: sagarcoaching.tech  |  Slide 14 of 37</a:t>
+              <a:t>Official Website: sagarcoaching.tech  |  Slide 14 of 37</a:t>
             </a:r>
           </a:p>
         </p:txBody>
@@ -6092,7 +6092,7 @@
               </a:defRPr>
             </a:pPr>
             <a:r>
-              <a:t>WhatsApp / Helpline: +91 91101 13671  |  Official Website: sagarcoaching.tech  |  Slide 15 of 37</a:t>
+              <a:t>Official Website: sagarcoaching.tech  |  Slide 15 of 37</a:t>
             </a:r>
           </a:p>
         </p:txBody>
@@ -6558,7 +6558,7 @@
               </a:defRPr>
             </a:pPr>
             <a:r>
-              <a:t>WhatsApp / Helpline: +91 91101 13671  |  Official Website: sagarcoaching.tech  |  Slide 16 of 37</a:t>
+              <a:t>Official Website: sagarcoaching.tech  |  Slide 16 of 37</a:t>
             </a:r>
           </a:p>
         </p:txBody>
@@ -7092,7 +7092,7 @@
               </a:defRPr>
             </a:pPr>
             <a:r>
-              <a:t>WhatsApp / Helpline: +91 91101 13671  |  Official Website: sagarcoaching.tech  |  Slide 17 of 37</a:t>
+              <a:t>Official Website: sagarcoaching.tech  |  Slide 17 of 37</a:t>
             </a:r>
           </a:p>
         </p:txBody>
@@ -7558,7 +7558,7 @@
               </a:defRPr>
             </a:pPr>
             <a:r>
-              <a:t>WhatsApp / Helpline: +91 91101 13671  |  Official Website: sagarcoaching.tech  |  Slide 18 of 37</a:t>
+              <a:t>Official Website: sagarcoaching.tech  |  Slide 18 of 37</a:t>
             </a:r>
           </a:p>
         </p:txBody>
@@ -8092,7 +8092,7 @@
               </a:defRPr>
             </a:pPr>
             <a:r>
-              <a:t>WhatsApp / Helpline: +91 91101 13671  |  Official Website: sagarcoaching.tech  |  Slide 19 of 37</a:t>
+              <a:t>Official Website: sagarcoaching.tech  |  Slide 19 of 37</a:t>
             </a:r>
           </a:p>
         </p:txBody>
@@ -8558,7 +8558,7 @@
               </a:defRPr>
             </a:pPr>
             <a:r>
-              <a:t>WhatsApp / Helpline: +91 91101 13671  |  Official Website: sagarcoaching.tech  |  Slide 2 of 37</a:t>
+              <a:t>Official Website: sagarcoaching.tech  |  Slide 2 of 37</a:t>
             </a:r>
           </a:p>
         </p:txBody>
@@ -8975,7 +8975,7 @@
               </a:defRPr>
             </a:pPr>
             <a:r>
-              <a:t>WhatsApp / Helpline: +91 91101 13671  |  Official Website: sagarcoaching.tech  |  Slide 20 of 37</a:t>
+              <a:t>Official Website: sagarcoaching.tech  |  Slide 20 of 37</a:t>
             </a:r>
           </a:p>
         </p:txBody>
@@ -9509,7 +9509,7 @@
               </a:defRPr>
             </a:pPr>
             <a:r>
-              <a:t>WhatsApp / Helpline: +91 91101 13671  |  Official Website: sagarcoaching.tech  |  Slide 21 of 37</a:t>
+              <a:t>Official Website: sagarcoaching.tech  |  Slide 21 of 37</a:t>
             </a:r>
           </a:p>
         </p:txBody>
@@ -9975,7 +9975,7 @@
               </a:defRPr>
             </a:pPr>
             <a:r>
-              <a:t>WhatsApp / Helpline: +91 91101 13671  |  Official Website: sagarcoaching.tech  |  Slide 22 of 37</a:t>
+              <a:t>Official Website: sagarcoaching.tech  |  Slide 22 of 37</a:t>
             </a:r>
           </a:p>
         </p:txBody>
@@ -10509,7 +10509,7 @@
               </a:defRPr>
             </a:pPr>
             <a:r>
-              <a:t>WhatsApp / Helpline: +91 91101 13671  |  Official Website: sagarcoaching.tech  |  Slide 23 of 37</a:t>
+              <a:t>Official Website: sagarcoaching.tech  |  Slide 23 of 37</a:t>
             </a:r>
           </a:p>
         </p:txBody>
@@ -10975,7 +10975,7 @@
               </a:defRPr>
             </a:pPr>
             <a:r>
-              <a:t>WhatsApp / Helpline: +91 91101 13671  |  Official Website: sagarcoaching.tech  |  Slide 24 of 37</a:t>
+              <a:t>Official Website: sagarcoaching.tech  |  Slide 24 of 37</a:t>
             </a:r>
           </a:p>
         </p:txBody>
@@ -11509,7 +11509,7 @@
               </a:defRPr>
             </a:pPr>
             <a:r>
-              <a:t>WhatsApp / Helpline: +91 91101 13671  |  Official Website: sagarcoaching.tech  |  Slide 25 of 37</a:t>
+              <a:t>Official Website: sagarcoaching.tech  |  Slide 25 of 37</a:t>
             </a:r>
           </a:p>
         </p:txBody>
@@ -11975,7 +11975,7 @@
               </a:defRPr>
             </a:pPr>
             <a:r>
-              <a:t>WhatsApp / Helpline: +91 91101 13671  |  Official Website: sagarcoaching.tech  |  Slide 26 of 37</a:t>
+              <a:t>Official Website: sagarcoaching.tech  |  Slide 26 of 37</a:t>
             </a:r>
           </a:p>
         </p:txBody>
@@ -12509,7 +12509,7 @@
               </a:defRPr>
             </a:pPr>
             <a:r>
-              <a:t>WhatsApp / Helpline: +91 91101 13671  |  Official Website: sagarcoaching.tech  |  Slide 27 of 37</a:t>
+              <a:t>Official Website: sagarcoaching.tech  |  Slide 27 of 37</a:t>
             </a:r>
           </a:p>
         </p:txBody>
@@ -12975,7 +12975,7 @@
               </a:defRPr>
             </a:pPr>
             <a:r>
-              <a:t>WhatsApp / Helpline: +91 91101 13671  |  Official Website: sagarcoaching.tech  |  Slide 28 of 37</a:t>
+              <a:t>Official Website: sagarcoaching.tech  |  Slide 28 of 37</a:t>
             </a:r>
           </a:p>
         </p:txBody>
@@ -13509,7 +13509,7 @@
               </a:defRPr>
             </a:pPr>
             <a:r>
-              <a:t>WhatsApp / Helpline: +91 91101 13671  |  Official Website: sagarcoaching.tech  |  Slide 29 of 37</a:t>
+              <a:t>Official Website: sagarcoaching.tech  |  Slide 29 of 37</a:t>
             </a:r>
           </a:p>
         </p:txBody>
@@ -13975,7 +13975,7 @@
               </a:defRPr>
             </a:pPr>
             <a:r>
-              <a:t>WhatsApp / Helpline: +91 91101 13671  |  Official Website: sagarcoaching.tech  |  Slide 3 of 37</a:t>
+              <a:t>Official Website: sagarcoaching.tech  |  Slide 3 of 37</a:t>
             </a:r>
           </a:p>
         </p:txBody>
@@ -14373,7 +14373,7 @@
               </a:defRPr>
             </a:pPr>
             <a:r>
-              <a:t>WhatsApp / Helpline: +91 91101 13671  |  Official Website: sagarcoaching.tech  |  Slide 30 of 37</a:t>
+              <a:t>Official Website: sagarcoaching.tech  |  Slide 30 of 37</a:t>
             </a:r>
           </a:p>
         </p:txBody>
@@ -14907,7 +14907,7 @@
               </a:defRPr>
             </a:pPr>
             <a:r>
-              <a:t>WhatsApp / Helpline: +91 91101 13671  |  Official Website: sagarcoaching.tech  |  Slide 31 of 37</a:t>
+              <a:t>Official Website: sagarcoaching.tech  |  Slide 31 of 37</a:t>
             </a:r>
           </a:p>
         </p:txBody>
@@ -15373,7 +15373,7 @@
               </a:defRPr>
             </a:pPr>
             <a:r>
-              <a:t>WhatsApp / Helpline: +91 91101 13671  |  Official Website: sagarcoaching.tech  |  Slide 32 of 37</a:t>
+              <a:t>Official Website: sagarcoaching.tech  |  Slide 32 of 37</a:t>
             </a:r>
           </a:p>
         </p:txBody>
@@ -15907,7 +15907,7 @@
               </a:defRPr>
             </a:pPr>
             <a:r>
-              <a:t>WhatsApp / Helpline: +91 91101 13671  |  Official Website: sagarcoaching.tech  |  Slide 33 of 37</a:t>
+              <a:t>Official Website: sagarcoaching.tech  |  Slide 33 of 37</a:t>
             </a:r>
           </a:p>
         </p:txBody>
@@ -16373,7 +16373,7 @@
               </a:defRPr>
             </a:pPr>
             <a:r>
-              <a:t>WhatsApp / Helpline: +91 91101 13671  |  Official Website: sagarcoaching.tech  |  Slide 34 of 37</a:t>
+              <a:t>Official Website: sagarcoaching.tech  |  Slide 34 of 37</a:t>
             </a:r>
           </a:p>
         </p:txBody>
@@ -16907,7 +16907,7 @@
               </a:defRPr>
             </a:pPr>
             <a:r>
-              <a:t>WhatsApp / Helpline: +91 91101 13671  |  Official Website: sagarcoaching.tech  |  Slide 35 of 37</a:t>
+              <a:t>Official Website: sagarcoaching.tech  |  Slide 35 of 37</a:t>
             </a:r>
           </a:p>
         </p:txBody>
@@ -17249,7 +17249,7 @@
               </a:defRPr>
             </a:pPr>
             <a:r>
-              <a:t>WhatsApp / Helpline: +91 91101 13671  |  Official Website: sagarcoaching.tech  |  Slide 36 of 37</a:t>
+              <a:t>Official Website: sagarcoaching.tech  |  Slide 36 of 37</a:t>
             </a:r>
           </a:p>
         </p:txBody>
@@ -17514,7 +17514,7 @@
               </a:defRPr>
             </a:pPr>
             <a:r>
-              <a:t>इस क्लास की PDF डाउनलोड करें: sagarcoaching.tech | Helpline: +91 91101 13671</a:t>
+              <a:t>इस क्लास की PDF डाउनलोड करें: sagarcoaching.tech</a:t>
             </a:r>
           </a:p>
         </p:txBody>
@@ -17618,7 +17618,7 @@
               </a:defRPr>
             </a:pPr>
             <a:r>
-              <a:t>मार्गदर्शक: श्रवण कुमार 'सागर' (Sagar Sir)  |  Helpline: +91 91101 13671  |  sagarcoaching.tech</a:t>
+              <a:t>मार्गदर्शक: श्रवण कुमार 'सागर' (Sagar Sir)  |  sagarcoaching.tech</a:t>
             </a:r>
           </a:p>
         </p:txBody>
@@ -17809,7 +17809,7 @@
               </a:defRPr>
             </a:pPr>
             <a:r>
-              <a:t>WhatsApp / Helpline: +91 91101 13671  |  Official Website: sagarcoaching.tech  |  Slide 4 of 37</a:t>
+              <a:t>Official Website: sagarcoaching.tech  |  Slide 4 of 37</a:t>
             </a:r>
           </a:p>
         </p:txBody>
@@ -18150,7 +18150,7 @@
               </a:defRPr>
             </a:pPr>
             <a:r>
-              <a:t>WhatsApp / Helpline: +91 91101 13671  |  Official Website: sagarcoaching.tech  |  Slide 5 of 37</a:t>
+              <a:t>Official Website: sagarcoaching.tech  |  Slide 5 of 37</a:t>
             </a:r>
           </a:p>
         </p:txBody>
@@ -18616,7 +18616,7 @@
               </a:defRPr>
             </a:pPr>
             <a:r>
-              <a:t>WhatsApp / Helpline: +91 91101 13671  |  Official Website: sagarcoaching.tech  |  Slide 6 of 37</a:t>
+              <a:t>Official Website: sagarcoaching.tech  |  Slide 6 of 37</a:t>
             </a:r>
           </a:p>
         </p:txBody>
@@ -19150,7 +19150,7 @@
               </a:defRPr>
             </a:pPr>
             <a:r>
-              <a:t>WhatsApp / Helpline: +91 91101 13671  |  Official Website: sagarcoaching.tech  |  Slide 7 of 37</a:t>
+              <a:t>Official Website: sagarcoaching.tech  |  Slide 7 of 37</a:t>
             </a:r>
           </a:p>
         </p:txBody>
@@ -19616,7 +19616,7 @@
               </a:defRPr>
             </a:pPr>
             <a:r>
-              <a:t>WhatsApp / Helpline: +91 91101 13671  |  Official Website: sagarcoaching.tech  |  Slide 8 of 37</a:t>
+              <a:t>Official Website: sagarcoaching.tech  |  Slide 8 of 37</a:t>
             </a:r>
           </a:p>
         </p:txBody>
@@ -20150,7 +20150,7 @@
               </a:defRPr>
             </a:pPr>
             <a:r>
-              <a:t>WhatsApp / Helpline: +91 91101 13671  |  Official Website: sagarcoaching.tech  |  Slide 9 of 37</a:t>
+              <a:t>Official Website: sagarcoaching.tech  |  Slide 9 of 37</a:t>
             </a:r>
           </a:p>
         </p:txBody>
